--- a/slides/ch08-persuasive-messages.pptx
+++ b/slides/ch08-persuasive-messages.pptx
@@ -7020,7 +7020,7 @@
                 </a:solidFill>
                 <a:latin typeface="Calibri"/>
               </a:rPr>
-              <a:t>BADM 225 · Chapter 8</a:t>
+              <a:t>BADM 225 · Chapter 8  ·  © Derek D. Bussan</a:t>
             </a:r>
           </a:p>
         </p:txBody>
@@ -7688,7 +7688,7 @@
                 </a:solidFill>
                 <a:latin typeface="Calibri"/>
               </a:rPr>
-              <a:t>BADM 225 · Chapter 8</a:t>
+              <a:t>BADM 225 · Chapter 8  ·  © Derek D. Bussan</a:t>
             </a:r>
           </a:p>
         </p:txBody>
@@ -8250,7 +8250,7 @@
                 </a:solidFill>
                 <a:latin typeface="Calibri"/>
               </a:rPr>
-              <a:t>BADM 225 · Chapter 8</a:t>
+              <a:t>BADM 225 · Chapter 8  ·  © Derek D. Bussan</a:t>
             </a:r>
           </a:p>
         </p:txBody>
@@ -8651,7 +8651,7 @@
                 </a:solidFill>
                 <a:latin typeface="Calibri"/>
               </a:rPr>
-              <a:t>BADM 225 · Chapter 8</a:t>
+              <a:t>BADM 225 · Chapter 8  ·  © Derek D. Bussan</a:t>
             </a:r>
           </a:p>
         </p:txBody>
@@ -8938,7 +8938,7 @@
                 </a:solidFill>
                 <a:latin typeface="Calibri"/>
               </a:rPr>
-              <a:t>BADM 225 · Chapter 8</a:t>
+              <a:t>BADM 225 · Chapter 8  ·  © Derek D. Bussan</a:t>
             </a:r>
           </a:p>
         </p:txBody>
@@ -9592,7 +9592,7 @@
                 </a:solidFill>
                 <a:latin typeface="Calibri"/>
               </a:rPr>
-              <a:t>BADM 225 · Chapter 8</a:t>
+              <a:t>BADM 225 · Chapter 8  ·  © Derek D. Bussan</a:t>
             </a:r>
           </a:p>
         </p:txBody>
@@ -9879,7 +9879,7 @@
                 </a:solidFill>
                 <a:latin typeface="Calibri"/>
               </a:rPr>
-              <a:t>BADM 225 · Chapter 8</a:t>
+              <a:t>BADM 225 · Chapter 8  ·  © Derek D. Bussan</a:t>
             </a:r>
           </a:p>
         </p:txBody>
@@ -10244,7 +10244,7 @@
                 </a:solidFill>
                 <a:latin typeface="Calibri"/>
               </a:rPr>
-              <a:t>BADM 225 · Chapter 8</a:t>
+              <a:t>BADM 225 · Chapter 8  ·  © Derek D. Bussan</a:t>
             </a:r>
           </a:p>
         </p:txBody>
@@ -10372,7 +10372,7 @@
                 </a:solidFill>
                 <a:latin typeface="Calibri"/>
               </a:rPr>
-              <a:t>BADM 225 · Chapter 8</a:t>
+              <a:t>BADM 225 · Chapter 8  ·  © Derek D. Bussan</a:t>
             </a:r>
           </a:p>
         </p:txBody>
@@ -10659,7 +10659,7 @@
                 </a:solidFill>
                 <a:latin typeface="Calibri"/>
               </a:rPr>
-              <a:t>BADM 225 · Chapter 8</a:t>
+              <a:t>BADM 225 · Chapter 8  ·  © Derek D. Bussan</a:t>
             </a:r>
           </a:p>
         </p:txBody>
@@ -10946,7 +10946,7 @@
                 </a:solidFill>
                 <a:latin typeface="Calibri"/>
               </a:rPr>
-              <a:t>BADM 225 · Chapter 8</a:t>
+              <a:t>BADM 225 · Chapter 8  ·  © Derek D. Bussan</a:t>
             </a:r>
           </a:p>
         </p:txBody>
@@ -11267,7 +11267,7 @@
                 </a:solidFill>
                 <a:latin typeface="Calibri"/>
               </a:rPr>
-              <a:t>BADM 225 · Chapter 8</a:t>
+              <a:t>BADM 225 · Chapter 8  ·  © Derek D. Bussan</a:t>
             </a:r>
           </a:p>
         </p:txBody>
@@ -11554,7 +11554,7 @@
                 </a:solidFill>
                 <a:latin typeface="Calibri"/>
               </a:rPr>
-              <a:t>BADM 225 · Chapter 8</a:t>
+              <a:t>BADM 225 · Chapter 8  ·  © Derek D. Bussan</a:t>
             </a:r>
           </a:p>
         </p:txBody>
@@ -12024,7 +12024,7 @@
                 </a:solidFill>
                 <a:latin typeface="Calibri"/>
               </a:rPr>
-              <a:t>BADM 225 · Chapter 8</a:t>
+              <a:t>BADM 225 · Chapter 8  ·  © Derek D. Bussan</a:t>
             </a:r>
           </a:p>
         </p:txBody>
@@ -12152,7 +12152,7 @@
                 </a:solidFill>
                 <a:latin typeface="Calibri"/>
               </a:rPr>
-              <a:t>BADM 225 · Chapter 8</a:t>
+              <a:t>BADM 225 · Chapter 8  ·  © Derek D. Bussan</a:t>
             </a:r>
           </a:p>
         </p:txBody>
@@ -12439,7 +12439,7 @@
                 </a:solidFill>
                 <a:latin typeface="Calibri"/>
               </a:rPr>
-              <a:t>BADM 225 · Chapter 8</a:t>
+              <a:t>BADM 225 · Chapter 8  ·  © Derek D. Bussan</a:t>
             </a:r>
           </a:p>
         </p:txBody>
@@ -13107,7 +13107,7 @@
                 </a:solidFill>
                 <a:latin typeface="Calibri"/>
               </a:rPr>
-              <a:t>BADM 225 · Chapter 8</a:t>
+              <a:t>BADM 225 · Chapter 8  ·  © Derek D. Bussan</a:t>
             </a:r>
           </a:p>
         </p:txBody>
@@ -13394,7 +13394,7 @@
                 </a:solidFill>
                 <a:latin typeface="Calibri"/>
               </a:rPr>
-              <a:t>BADM 225 · Chapter 8</a:t>
+              <a:t>BADM 225 · Chapter 8  ·  © Derek D. Bussan</a:t>
             </a:r>
           </a:p>
         </p:txBody>
@@ -13836,7 +13836,7 @@
                 </a:solidFill>
                 <a:latin typeface="Calibri"/>
               </a:rPr>
-              <a:t>BADM 225 · Chapter 8</a:t>
+              <a:t>BADM 225 · Chapter 8  ·  © Derek D. Bussan</a:t>
             </a:r>
           </a:p>
         </p:txBody>
@@ -14201,7 +14201,7 @@
                 </a:solidFill>
                 <a:latin typeface="Calibri"/>
               </a:rPr>
-              <a:t>BADM 225 · Chapter 8</a:t>
+              <a:t>BADM 225 · Chapter 8  ·  © Derek D. Bussan</a:t>
             </a:r>
           </a:p>
         </p:txBody>
@@ -14329,7 +14329,7 @@
                 </a:solidFill>
                 <a:latin typeface="Calibri"/>
               </a:rPr>
-              <a:t>BADM 225 · Chapter 8</a:t>
+              <a:t>BADM 225 · Chapter 8  ·  © Derek D. Bussan</a:t>
             </a:r>
           </a:p>
         </p:txBody>
@@ -14616,7 +14616,7 @@
                 </a:solidFill>
                 <a:latin typeface="Calibri"/>
               </a:rPr>
-              <a:t>BADM 225 · Chapter 8</a:t>
+              <a:t>BADM 225 · Chapter 8  ·  © Derek D. Bussan</a:t>
             </a:r>
           </a:p>
         </p:txBody>
@@ -14903,7 +14903,7 @@
                 </a:solidFill>
                 <a:latin typeface="Calibri"/>
               </a:rPr>
-              <a:t>BADM 225 · Chapter 8</a:t>
+              <a:t>BADM 225 · Chapter 8  ·  © Derek D. Bussan</a:t>
             </a:r>
           </a:p>
         </p:txBody>
@@ -15463,7 +15463,7 @@
                 </a:solidFill>
                 <a:latin typeface="Calibri"/>
               </a:rPr>
-              <a:t>BADM 225 · Chapter 8</a:t>
+              <a:t>BADM 225 · Chapter 8  ·  © Derek D. Bussan</a:t>
             </a:r>
           </a:p>
         </p:txBody>
@@ -15750,7 +15750,7 @@
                 </a:solidFill>
                 <a:latin typeface="Calibri"/>
               </a:rPr>
-              <a:t>BADM 225 · Chapter 8</a:t>
+              <a:t>BADM 225 · Chapter 8  ·  © Derek D. Bussan</a:t>
             </a:r>
           </a:p>
         </p:txBody>
@@ -16115,7 +16115,7 @@
                 </a:solidFill>
                 <a:latin typeface="Calibri"/>
               </a:rPr>
-              <a:t>BADM 225 · Chapter 8</a:t>
+              <a:t>BADM 225 · Chapter 8  ·  © Derek D. Bussan</a:t>
             </a:r>
           </a:p>
         </p:txBody>
@@ -16243,7 +16243,7 @@
                 </a:solidFill>
                 <a:latin typeface="Calibri"/>
               </a:rPr>
-              <a:t>BADM 225 · Chapter 8</a:t>
+              <a:t>BADM 225 · Chapter 8  ·  © Derek D. Bussan</a:t>
             </a:r>
           </a:p>
         </p:txBody>
@@ -16669,7 +16669,7 @@
                 </a:solidFill>
                 <a:latin typeface="Calibri"/>
               </a:rPr>
-              <a:t>BADM 225 · Chapter 8</a:t>
+              <a:t>BADM 225 · Chapter 8  ·  © Derek D. Bussan</a:t>
             </a:r>
           </a:p>
         </p:txBody>
@@ -16956,7 +16956,7 @@
                 </a:solidFill>
                 <a:latin typeface="Calibri"/>
               </a:rPr>
-              <a:t>BADM 225 · Chapter 8</a:t>
+              <a:t>BADM 225 · Chapter 8  ·  © Derek D. Bussan</a:t>
             </a:r>
           </a:p>
         </p:txBody>
@@ -17321,7 +17321,7 @@
                 </a:solidFill>
                 <a:latin typeface="Calibri"/>
               </a:rPr>
-              <a:t>BADM 225 · Chapter 8</a:t>
+              <a:t>BADM 225 · Chapter 8  ·  © Derek D. Bussan</a:t>
             </a:r>
           </a:p>
         </p:txBody>
@@ -17449,7 +17449,7 @@
                 </a:solidFill>
                 <a:latin typeface="Calibri"/>
               </a:rPr>
-              <a:t>BADM 225 · Chapter 8</a:t>
+              <a:t>BADM 225 · Chapter 8  ·  © Derek D. Bussan</a:t>
             </a:r>
           </a:p>
         </p:txBody>
@@ -17736,7 +17736,7 @@
                 </a:solidFill>
                 <a:latin typeface="Calibri"/>
               </a:rPr>
-              <a:t>BADM 225 · Chapter 8</a:t>
+              <a:t>BADM 225 · Chapter 8  ·  © Derek D. Bussan</a:t>
             </a:r>
           </a:p>
         </p:txBody>
@@ -18101,7 +18101,7 @@
                 </a:solidFill>
                 <a:latin typeface="Calibri"/>
               </a:rPr>
-              <a:t>BADM 225 · Chapter 8</a:t>
+              <a:t>BADM 225 · Chapter 8  ·  © Derek D. Bussan</a:t>
             </a:r>
           </a:p>
         </p:txBody>
@@ -18229,7 +18229,7 @@
                 </a:solidFill>
                 <a:latin typeface="Calibri"/>
               </a:rPr>
-              <a:t>BADM 225 · Chapter 8</a:t>
+              <a:t>BADM 225 · Chapter 8  ·  © Derek D. Bussan</a:t>
             </a:r>
           </a:p>
         </p:txBody>
@@ -18516,7 +18516,7 @@
                 </a:solidFill>
                 <a:latin typeface="Calibri"/>
               </a:rPr>
-              <a:t>BADM 225 · Chapter 8</a:t>
+              <a:t>BADM 225 · Chapter 8  ·  © Derek D. Bussan</a:t>
             </a:r>
           </a:p>
         </p:txBody>
@@ -18803,7 +18803,7 @@
                 </a:solidFill>
                 <a:latin typeface="Calibri"/>
               </a:rPr>
-              <a:t>BADM 225 · Chapter 8</a:t>
+              <a:t>BADM 225 · Chapter 8  ·  © Derek D. Bussan</a:t>
             </a:r>
           </a:p>
         </p:txBody>
@@ -19090,7 +19090,7 @@
                 </a:solidFill>
                 <a:latin typeface="Calibri"/>
               </a:rPr>
-              <a:t>BADM 225 · Chapter 8</a:t>
+              <a:t>BADM 225 · Chapter 8  ·  © Derek D. Bussan</a:t>
             </a:r>
           </a:p>
         </p:txBody>
@@ -19532,7 +19532,7 @@
                 </a:solidFill>
                 <a:latin typeface="Calibri"/>
               </a:rPr>
-              <a:t>BADM 225 · Chapter 8</a:t>
+              <a:t>BADM 225 · Chapter 8  ·  © Derek D. Bussan</a:t>
             </a:r>
           </a:p>
         </p:txBody>
@@ -20347,7 +20347,7 @@
                 </a:solidFill>
                 <a:latin typeface="Calibri"/>
               </a:rPr>
-              <a:t>BADM 225 · Chapter 8</a:t>
+              <a:t>BADM 225 · Chapter 8  ·  © Derek D. Bussan</a:t>
             </a:r>
           </a:p>
         </p:txBody>
@@ -20623,7 +20623,7 @@
                 </a:solidFill>
                 <a:latin typeface="Calibri"/>
               </a:rPr>
-              <a:t>BADM 225 · Chapter 8</a:t>
+              <a:t>BADM 225 · Chapter 8  ·  © Derek D. Bussan</a:t>
             </a:r>
           </a:p>
         </p:txBody>
@@ -20716,7 +20716,7 @@
                 </a:solidFill>
                 <a:latin typeface="Calibri"/>
               </a:rPr>
-              <a:t>BADM 225 · Chapter 8</a:t>
+              <a:t>BADM 225 · Chapter 8  ·  © Derek D. Bussan</a:t>
             </a:r>
           </a:p>
         </p:txBody>
@@ -21037,7 +21037,7 @@
                 </a:solidFill>
                 <a:latin typeface="Calibri"/>
               </a:rPr>
-              <a:t>BADM 225 · Chapter 8</a:t>
+              <a:t>BADM 225 · Chapter 8  ·  © Derek D. Bussan</a:t>
             </a:r>
           </a:p>
         </p:txBody>
@@ -21675,7 +21675,7 @@
                 </a:solidFill>
                 <a:latin typeface="Calibri"/>
               </a:rPr>
-              <a:t>BADM 225 · Chapter 8</a:t>
+              <a:t>BADM 225 · Chapter 8  ·  © Derek D. Bussan</a:t>
             </a:r>
           </a:p>
         </p:txBody>
@@ -21803,7 +21803,7 @@
                 </a:solidFill>
                 <a:latin typeface="Calibri"/>
               </a:rPr>
-              <a:t>BADM 225 · Chapter 8</a:t>
+              <a:t>BADM 225 · Chapter 8  ·  © Derek D. Bussan</a:t>
             </a:r>
           </a:p>
         </p:txBody>
@@ -22365,7 +22365,7 @@
                 </a:solidFill>
                 <a:latin typeface="Calibri"/>
               </a:rPr>
-              <a:t>BADM 225 · Chapter 8</a:t>
+              <a:t>BADM 225 · Chapter 8  ·  © Derek D. Bussan</a:t>
             </a:r>
           </a:p>
         </p:txBody>
@@ -22835,7 +22835,7 @@
                 </a:solidFill>
                 <a:latin typeface="Calibri"/>
               </a:rPr>
-              <a:t>BADM 225 · Chapter 8</a:t>
+              <a:t>BADM 225 · Chapter 8  ·  © Derek D. Bussan</a:t>
             </a:r>
           </a:p>
         </p:txBody>

--- a/slides/ch08-persuasive-messages.pptx
+++ b/slides/ch08-persuasive-messages.pptx
@@ -6927,7 +6927,7 @@
                 </a:solidFill>
                 <a:latin typeface="Calibri"/>
               </a:rPr>
-              <a:t>BADM 225 · Chapter 8  ·  Original instructional material — no publisher content</a:t>
+              <a:t>BADM 225 · Chapter 8  ·  Original material © 2026 Derek D. Bussan, PhD, MBA  ·  No publisher content</a:t>
             </a:r>
           </a:p>
         </p:txBody>
